--- a/documents/Peer Review - EPIC.pptx
+++ b/documents/Peer Review - EPIC.pptx
@@ -116,11 +116,6 @@
       </a:defRPr>
     </a:lvl9pPr>
   </p:defaultTextStyle>
-  <p:extLst>
-    <p:ext uri="{EFAFB233-063F-42B5-8137-9DF3F51BA10A}">
-      <p15:sldGuideLst xmlns:p15="http://schemas.microsoft.com/office/powerpoint/2012/main"/>
-    </p:ext>
-  </p:extLst>
 </p:presentation>
 </file>
 
@@ -128,7 +123,7 @@
 <p1510:revInfo xmlns:a="http://schemas.openxmlformats.org/drawingml/2006/main" xmlns:r="http://schemas.openxmlformats.org/officeDocument/2006/relationships" xmlns:p1510="http://schemas.microsoft.com/office/powerpoint/2015/10/main">
   <p1510:revLst>
     <p1510:client id="{121215A5-E84B-6533-00E7-C3A7218C8746}" v="3" dt="2026-06-08T17:34:00.339"/>
-    <p1510:client id="{5294F365-9EC1-CA44-B273-2A43E747F6C3}" v="36" dt="2026-06-08T18:15:19.796"/>
+    <p1510:client id="{5294F365-9EC1-CA44-B273-2A43E747F6C3}" v="37" dt="2026-06-08T19:29:40.841"/>
   </p1510:revLst>
 </p1510:revInfo>
 </file>
@@ -138,7 +133,7 @@
   <pc:docChgLst>
     <pc:chgData name="Morgan, Robb" userId="6e49e175-ae62-4b25-a9b8-980198524bb0" providerId="ADAL" clId="{815032F7-E4C2-5F74-92C0-8B55A1DE40FC}"/>
     <pc:docChg chg="undo custSel delSld modSld">
-      <pc:chgData name="Morgan, Robb" userId="6e49e175-ae62-4b25-a9b8-980198524bb0" providerId="ADAL" clId="{815032F7-E4C2-5F74-92C0-8B55A1DE40FC}" dt="2026-06-08T18:15:19.796" v="199" actId="20577"/>
+      <pc:chgData name="Morgan, Robb" userId="6e49e175-ae62-4b25-a9b8-980198524bb0" providerId="ADAL" clId="{815032F7-E4C2-5F74-92C0-8B55A1DE40FC}" dt="2026-06-08T19:29:47.715" v="226" actId="1076"/>
       <pc:docMkLst>
         <pc:docMk/>
       </pc:docMkLst>
@@ -157,12 +152,20 @@
           </ac:spMkLst>
         </pc:spChg>
       </pc:sldChg>
-      <pc:sldChg chg="modSp">
-        <pc:chgData name="Morgan, Robb" userId="6e49e175-ae62-4b25-a9b8-980198524bb0" providerId="ADAL" clId="{815032F7-E4C2-5F74-92C0-8B55A1DE40FC}" dt="2026-06-08T18:02:23.500" v="112"/>
+      <pc:sldChg chg="modSp mod">
+        <pc:chgData name="Morgan, Robb" userId="6e49e175-ae62-4b25-a9b8-980198524bb0" providerId="ADAL" clId="{815032F7-E4C2-5F74-92C0-8B55A1DE40FC}" dt="2026-06-08T18:31:46.702" v="221" actId="20577"/>
         <pc:sldMkLst>
           <pc:docMk/>
           <pc:sldMk cId="28918216" sldId="258"/>
         </pc:sldMkLst>
+        <pc:spChg chg="mod">
+          <ac:chgData name="Morgan, Robb" userId="6e49e175-ae62-4b25-a9b8-980198524bb0" providerId="ADAL" clId="{815032F7-E4C2-5F74-92C0-8B55A1DE40FC}" dt="2026-06-08T18:31:46.702" v="221" actId="20577"/>
+          <ac:spMkLst>
+            <pc:docMk/>
+            <pc:sldMk cId="28918216" sldId="258"/>
+            <ac:spMk id="2" creationId="{2CF0CD1D-79DA-C8E1-3D9C-FC96EF2269CA}"/>
+          </ac:spMkLst>
+        </pc:spChg>
         <pc:spChg chg="mod">
           <ac:chgData name="Morgan, Robb" userId="6e49e175-ae62-4b25-a9b8-980198524bb0" providerId="ADAL" clId="{815032F7-E4C2-5F74-92C0-8B55A1DE40FC}" dt="2026-06-08T18:02:23.500" v="112"/>
           <ac:spMkLst>
@@ -196,7 +199,7 @@
         </pc:graphicFrameChg>
       </pc:sldChg>
       <pc:sldChg chg="addSp delSp modSp mod">
-        <pc:chgData name="Morgan, Robb" userId="6e49e175-ae62-4b25-a9b8-980198524bb0" providerId="ADAL" clId="{815032F7-E4C2-5F74-92C0-8B55A1DE40FC}" dt="2026-06-08T18:14:12.366" v="181" actId="1076"/>
+        <pc:chgData name="Morgan, Robb" userId="6e49e175-ae62-4b25-a9b8-980198524bb0" providerId="ADAL" clId="{815032F7-E4C2-5F74-92C0-8B55A1DE40FC}" dt="2026-06-08T19:29:47.715" v="226" actId="1076"/>
         <pc:sldMkLst>
           <pc:docMk/>
           <pc:sldMk cId="3761023704" sldId="260"/>
@@ -217,6 +220,14 @@
             <ac:spMk id="6" creationId="{1FED7751-948F-B187-3C2A-3D9F8FD556A6}"/>
           </ac:spMkLst>
         </pc:spChg>
+        <pc:picChg chg="add mod">
+          <ac:chgData name="Morgan, Robb" userId="6e49e175-ae62-4b25-a9b8-980198524bb0" providerId="ADAL" clId="{815032F7-E4C2-5F74-92C0-8B55A1DE40FC}" dt="2026-06-08T19:29:47.715" v="226" actId="1076"/>
+          <ac:picMkLst>
+            <pc:docMk/>
+            <pc:sldMk cId="3761023704" sldId="260"/>
+            <ac:picMk id="4" creationId="{C0E7E8A8-FB39-DA10-4CCE-03C405E9EFE1}"/>
+          </ac:picMkLst>
+        </pc:picChg>
         <pc:picChg chg="del">
           <ac:chgData name="Morgan, Robb" userId="6e49e175-ae62-4b25-a9b8-980198524bb0" providerId="ADAL" clId="{815032F7-E4C2-5F74-92C0-8B55A1DE40FC}" dt="2026-06-08T18:13:45.893" v="175" actId="478"/>
           <ac:picMkLst>
@@ -225,8 +236,8 @@
             <ac:picMk id="5" creationId="{652B9DAA-D349-8D6F-C732-17BC0C2483F1}"/>
           </ac:picMkLst>
         </pc:picChg>
-        <pc:picChg chg="add mod">
-          <ac:chgData name="Morgan, Robb" userId="6e49e175-ae62-4b25-a9b8-980198524bb0" providerId="ADAL" clId="{815032F7-E4C2-5F74-92C0-8B55A1DE40FC}" dt="2026-06-08T18:14:12.366" v="181" actId="1076"/>
+        <pc:picChg chg="add del mod">
+          <ac:chgData name="Morgan, Robb" userId="6e49e175-ae62-4b25-a9b8-980198524bb0" providerId="ADAL" clId="{815032F7-E4C2-5F74-92C0-8B55A1DE40FC}" dt="2026-06-08T19:29:39.864" v="222" actId="478"/>
           <ac:picMkLst>
             <pc:docMk/>
             <pc:sldMk cId="3761023704" sldId="260"/>
@@ -787,12 +798,12 @@
           <a:lstStyle/>
           <a:p>
             <a:r>
-              <a:rPr lang="en-US" dirty="0"/>
+              <a:rPr lang="en-US"/>
               <a:t>Make it more friendly sounding – sharing more than review – Architecture Peer Presentation – Can we make it less scary</a:t>
             </a:r>
           </a:p>
           <a:p>
-            <a:endParaRPr lang="en-US" dirty="0"/>
+            <a:endParaRPr lang="en-US"/>
           </a:p>
         </p:txBody>
       </p:sp>
@@ -1027,14 +1038,14 @@
           <a:lstStyle/>
           <a:p>
             <a:r>
-              <a:rPr lang="en-US" dirty="0"/>
+              <a:rPr lang="en-US"/>
               <a:t>Add Safety and </a:t>
             </a:r>
             <a:r>
-              <a:rPr lang="en-US" dirty="0" err="1"/>
+              <a:rPr lang="en-US" err="1"/>
               <a:t>groundrules</a:t>
             </a:r>
-            <a:endParaRPr lang="en-US" dirty="0"/>
+            <a:endParaRPr lang="en-US"/>
           </a:p>
         </p:txBody>
       </p:sp>
@@ -1119,7 +1130,7 @@
           <a:lstStyle/>
           <a:p>
             <a:r>
-              <a:rPr lang="en-US" dirty="0"/>
+              <a:rPr lang="en-US"/>
               <a:t>No approve.  There no board</a:t>
             </a:r>
           </a:p>
@@ -1349,7 +1360,7 @@
           <a:bodyPr/>
           <a:lstStyle/>
           <a:p>
-            <a:endParaRPr lang="en-US" dirty="0"/>
+            <a:endParaRPr lang="en-US"/>
           </a:p>
         </p:txBody>
       </p:sp>
@@ -1434,7 +1445,7 @@
           <a:lstStyle/>
           <a:p>
             <a:r>
-              <a:rPr lang="en-US" dirty="0"/>
+              <a:rPr lang="en-US"/>
               <a:t>Pre-read</a:t>
             </a:r>
           </a:p>
@@ -1520,7 +1531,7 @@
           <a:bodyPr/>
           <a:lstStyle/>
           <a:p>
-            <a:endParaRPr lang="en-US" dirty="0"/>
+            <a:endParaRPr lang="en-US"/>
           </a:p>
         </p:txBody>
       </p:sp>
@@ -1619,7 +1630,6 @@
               <a:rPr lang="en-US"/>
               <a:t>Click to edit Master title style</a:t>
             </a:r>
-            <a:endParaRPr lang="en-US" dirty="0"/>
           </a:p>
         </p:txBody>
       </p:sp>
@@ -1698,7 +1708,6 @@
               <a:rPr lang="en-US"/>
               <a:t>Click to edit Master subtitle style</a:t>
             </a:r>
-            <a:endParaRPr lang="en-US" dirty="0"/>
           </a:p>
         </p:txBody>
       </p:sp>
@@ -1933,7 +1942,7 @@
           <a:p>
             <a:pPr lvl="0"/>
             <a:r>
-              <a:rPr lang="en-US" dirty="0"/>
+              <a:rPr lang="en-US"/>
               <a:t>Click to edit Presenter Name</a:t>
             </a:r>
           </a:p>
@@ -1980,7 +1989,7 @@
           <a:p>
             <a:pPr lvl="0"/>
             <a:r>
-              <a:rPr lang="en-US" dirty="0"/>
+              <a:rPr lang="en-US"/>
               <a:t>Click to edit Presenter Title</a:t>
             </a:r>
           </a:p>
@@ -2027,7 +2036,7 @@
           <a:p>
             <a:pPr lvl="0"/>
             <a:r>
-              <a:rPr lang="en-US" dirty="0"/>
+              <a:rPr lang="en-US"/>
               <a:t>Click to edit Presenter Department</a:t>
             </a:r>
           </a:p>
@@ -2136,7 +2145,7 @@
           <a:p>
             <a:pPr algn="ctr"/>
             <a:r>
-              <a:rPr lang="en-US" sz="900" b="1" dirty="0">
+              <a:rPr lang="en-US" sz="900" b="1">
                 <a:solidFill>
                   <a:schemeClr val="bg1"/>
                 </a:solidFill>
@@ -2144,7 +2153,7 @@
               <a:t>Trustworthy      </a:t>
             </a:r>
             <a:r>
-              <a:rPr lang="en-US" sz="900" b="1" dirty="0">
+              <a:rPr lang="en-US" sz="900" b="1">
                 <a:solidFill>
                   <a:schemeClr val="bg1"/>
                 </a:solidFill>
@@ -2153,7 +2162,7 @@
               <a:t>      </a:t>
             </a:r>
             <a:r>
-              <a:rPr lang="en-US" sz="900" b="1" dirty="0">
+              <a:rPr lang="en-US" sz="900" b="1">
                 <a:solidFill>
                   <a:schemeClr val="bg1"/>
                 </a:solidFill>
@@ -2161,7 +2170,7 @@
               <a:t>Empathetic      </a:t>
             </a:r>
             <a:r>
-              <a:rPr lang="en-US" sz="900" b="1" dirty="0">
+              <a:rPr lang="en-US" sz="900" b="1">
                 <a:solidFill>
                   <a:schemeClr val="bg1"/>
                 </a:solidFill>
@@ -2170,7 +2179,7 @@
               <a:t>      </a:t>
             </a:r>
             <a:r>
-              <a:rPr lang="en-US" sz="900" b="1" dirty="0">
+              <a:rPr lang="en-US" sz="900" b="1">
                 <a:solidFill>
                   <a:schemeClr val="tx1"/>
                 </a:solidFill>
@@ -2178,7 +2187,7 @@
               <a:t>Curious</a:t>
             </a:r>
             <a:r>
-              <a:rPr lang="en-US" sz="900" b="1" dirty="0">
+              <a:rPr lang="en-US" sz="900" b="1">
                 <a:solidFill>
                   <a:schemeClr val="bg1"/>
                 </a:solidFill>
@@ -2186,7 +2195,7 @@
               <a:t>      </a:t>
             </a:r>
             <a:r>
-              <a:rPr lang="en-US" sz="900" b="1" dirty="0">
+              <a:rPr lang="en-US" sz="900" b="1">
                 <a:solidFill>
                   <a:schemeClr val="bg1"/>
                 </a:solidFill>
@@ -2195,7 +2204,7 @@
               <a:t>      </a:t>
             </a:r>
             <a:r>
-              <a:rPr lang="en-US" sz="900" b="1" dirty="0">
+              <a:rPr lang="en-US" sz="900" b="1">
                 <a:solidFill>
                   <a:schemeClr val="bg1"/>
                 </a:solidFill>
@@ -2203,7 +2212,7 @@
               <a:t>Tenacious      </a:t>
             </a:r>
             <a:r>
-              <a:rPr lang="en-US" sz="900" b="1" dirty="0">
+              <a:rPr lang="en-US" sz="900" b="1">
                 <a:solidFill>
                   <a:schemeClr val="bg1"/>
                 </a:solidFill>
@@ -2212,7 +2221,7 @@
               <a:t>      </a:t>
             </a:r>
             <a:r>
-              <a:rPr lang="en-US" sz="900" b="1" dirty="0">
+              <a:rPr lang="en-US" sz="900" b="1">
                 <a:solidFill>
                   <a:schemeClr val="bg1"/>
                 </a:solidFill>
@@ -2220,7 +2229,7 @@
               <a:t>Nimble      </a:t>
             </a:r>
             <a:r>
-              <a:rPr lang="en-US" sz="900" b="1" dirty="0">
+              <a:rPr lang="en-US" sz="900" b="1">
                 <a:solidFill>
                   <a:schemeClr val="bg1"/>
                 </a:solidFill>
@@ -2229,7 +2238,7 @@
               <a:t>      </a:t>
             </a:r>
             <a:r>
-              <a:rPr lang="en-US" sz="900" b="1" dirty="0">
+              <a:rPr lang="en-US" sz="900" b="1">
                 <a:solidFill>
                   <a:schemeClr val="bg1"/>
                 </a:solidFill>
@@ -2711,7 +2720,7 @@
           <a:p>
             <a:pPr lvl="0"/>
             <a:r>
-              <a:rPr lang="en-US" dirty="0"/>
+              <a:rPr lang="en-US"/>
               <a:t>Click to edit Presentation Section Name</a:t>
             </a:r>
           </a:p>
@@ -2756,7 +2765,7 @@
           <a:p>
             <a:pPr lvl="0"/>
             <a:r>
-              <a:rPr lang="en-US" dirty="0"/>
+              <a:rPr lang="en-US"/>
               <a:t>Click to edit Slide Title</a:t>
             </a:r>
           </a:p>
@@ -2818,7 +2827,6 @@
               <a:rPr lang="en-US"/>
               <a:t>Click to edit Master title style</a:t>
             </a:r>
-            <a:endParaRPr lang="en-US" dirty="0"/>
           </a:p>
         </p:txBody>
       </p:sp>
@@ -3598,7 +3606,6 @@
               <a:rPr lang="en-US"/>
               <a:t>Fifth level</a:t>
             </a:r>
-            <a:endParaRPr lang="en-US" dirty="0"/>
           </a:p>
         </p:txBody>
       </p:sp>
@@ -4088,14 +4095,14 @@
           <a:p>
             <a:pPr marL="3175" indent="-3175"/>
             <a:r>
-              <a:rPr lang="en-US" dirty="0"/>
+              <a:rPr lang="en-US"/>
               <a:t>High-Level Architecture</a:t>
             </a:r>
             <a:br>
-              <a:rPr lang="en-US" dirty="0"/>
+              <a:rPr lang="en-US"/>
             </a:br>
             <a:r>
-              <a:rPr lang="en-US" dirty="0"/>
+              <a:rPr lang="en-US"/>
               <a:t>Review Session</a:t>
             </a:r>
           </a:p>
@@ -4125,7 +4132,7 @@
           <a:lstStyle/>
           <a:p>
             <a:r>
-              <a:rPr lang="en-US" sz="2400" dirty="0"/>
+              <a:rPr lang="en-US" sz="2400"/>
               <a:t>Robb Morgan</a:t>
             </a:r>
           </a:p>
@@ -4158,7 +4165,7 @@
           <a:lstStyle/>
           <a:p>
             <a:r>
-              <a:rPr lang="en-US" dirty="0"/>
+              <a:rPr lang="en-US"/>
               <a:t>IT Solutions Engineer</a:t>
             </a:r>
           </a:p>
@@ -4191,10 +4198,10 @@
           <a:lstStyle/>
           <a:p>
             <a:r>
-              <a:rPr lang="en-US" dirty="0" err="1"/>
+              <a:rPr lang="en-US" err="1"/>
               <a:t>CCoE</a:t>
             </a:r>
-            <a:endParaRPr lang="en-US" dirty="0"/>
+            <a:endParaRPr lang="en-US"/>
           </a:p>
         </p:txBody>
       </p:sp>
@@ -4228,7 +4235,7 @@
           <a:p>
             <a:pPr algn="r"/>
             <a:r>
-              <a:rPr lang="en-US" sz="1400" dirty="0">
+              <a:rPr lang="en-US" sz="1400">
                 <a:solidFill>
                   <a:schemeClr val="bg1">
                     <a:lumMod val="50000"/>
@@ -4238,7 +4245,7 @@
               <a:t>Architectural Peer Review performed: </a:t>
             </a:r>
             <a:r>
-              <a:rPr lang="en-US" dirty="0">
+              <a:rPr lang="en-US">
                 <a:solidFill>
                   <a:srgbClr val="ED9A2D"/>
                 </a:solidFill>
@@ -4246,7 +4253,7 @@
               <a:t>06/</a:t>
             </a:r>
             <a:r>
-              <a:rPr lang="en-US" sz="1800" dirty="0">
+              <a:rPr lang="en-US" sz="1800">
                 <a:solidFill>
                   <a:srgbClr val="ED9A2D"/>
                 </a:solidFill>
@@ -4283,41 +4290,41 @@
           <a:lstStyle/>
           <a:p>
             <a:r>
-              <a:rPr lang="en-US" dirty="0"/>
+              <a:rPr lang="en-US"/>
               <a:t>EPIC</a:t>
             </a:r>
           </a:p>
           <a:p>
             <a:r>
-              <a:rPr lang="en-US" sz="2400" b="1" dirty="0"/>
+              <a:rPr lang="en-US" sz="2400" b="1"/>
               <a:t>E</a:t>
             </a:r>
             <a:r>
-              <a:rPr lang="en-US" sz="2400" dirty="0"/>
+              <a:rPr lang="en-US" sz="2400"/>
               <a:t>nterprise </a:t>
             </a:r>
             <a:r>
-              <a:rPr lang="en-US" sz="2400" b="1" dirty="0"/>
+              <a:rPr lang="en-US" sz="2400" b="1"/>
               <a:t>P</a:t>
             </a:r>
             <a:r>
-              <a:rPr lang="en-US" sz="2400" dirty="0"/>
+              <a:rPr lang="en-US" sz="2400"/>
               <a:t>ipeline for </a:t>
             </a:r>
             <a:r>
-              <a:rPr lang="en-US" sz="2400" b="1" dirty="0"/>
+              <a:rPr lang="en-US" sz="2400" b="1"/>
               <a:t>I</a:t>
             </a:r>
             <a:r>
-              <a:rPr lang="en-US" sz="2400" dirty="0"/>
+              <a:rPr lang="en-US" sz="2400"/>
               <a:t>nfrastructure and </a:t>
             </a:r>
             <a:r>
-              <a:rPr lang="en-US" sz="2400" b="1" dirty="0"/>
+              <a:rPr lang="en-US" sz="2400" b="1"/>
               <a:t>C</a:t>
             </a:r>
             <a:r>
-              <a:rPr lang="en-US" sz="2400" dirty="0"/>
+              <a:rPr lang="en-US" sz="2400"/>
               <a:t>loud</a:t>
             </a:r>
           </a:p>
@@ -4381,12 +4388,12 @@
           <a:lstStyle/>
           <a:p>
             <a:r>
-              <a:rPr lang="en-US" dirty="0"/>
+              <a:rPr lang="en-US"/>
               <a:t>EPIC Peer Review: APP-2102 – ADO Pipeline</a:t>
             </a:r>
           </a:p>
           <a:p>
-            <a:endParaRPr lang="en-US" dirty="0"/>
+            <a:endParaRPr lang="en-US"/>
           </a:p>
         </p:txBody>
       </p:sp>
@@ -4412,7 +4419,7 @@
           <a:lstStyle/>
           <a:p>
             <a:r>
-              <a:rPr lang="en-US" dirty="0"/>
+              <a:rPr lang="en-US"/>
               <a:t>Appendix: Resources</a:t>
             </a:r>
           </a:p>
@@ -4447,7 +4454,7 @@
           <a:lstStyle/>
           <a:p>
             <a:r>
-              <a:rPr lang="en-US" dirty="0"/>
+              <a:rPr lang="en-US"/>
               <a:t>Project Documentation</a:t>
             </a:r>
           </a:p>
@@ -4570,7 +4577,7 @@
           <a:lstStyle/>
           <a:p>
             <a:r>
-              <a:rPr lang="en-US" dirty="0"/>
+              <a:rPr lang="en-US"/>
               <a:t>High-Level Architecture</a:t>
             </a:r>
           </a:p>
@@ -4605,7 +4612,7 @@
           <a:lstStyle/>
           <a:p>
             <a:r>
-              <a:rPr lang="en-US" dirty="0"/>
+              <a:rPr lang="en-US"/>
               <a:t>Project Contacts</a:t>
             </a:r>
           </a:p>
@@ -4640,7 +4647,7 @@
           <a:lstStyle/>
           <a:p>
             <a:r>
-              <a:rPr lang="en-US" sz="1400" dirty="0">
+              <a:rPr lang="en-US" sz="1400">
                 <a:solidFill>
                   <a:schemeClr val="bg1">
                     <a:lumMod val="50000"/>
@@ -4681,7 +4688,7 @@
           <a:lstStyle/>
           <a:p>
             <a:r>
-              <a:rPr lang="en-US" sz="1400" dirty="0">
+              <a:rPr lang="en-US" sz="1400">
                 <a:solidFill>
                   <a:schemeClr val="bg1">
                     <a:lumMod val="50000"/>
@@ -4722,7 +4729,7 @@
           <a:lstStyle/>
           <a:p>
             <a:r>
-              <a:rPr lang="en-US" sz="1400" dirty="0">
+              <a:rPr lang="en-US" sz="1400">
                 <a:solidFill>
                   <a:schemeClr val="bg1">
                     <a:lumMod val="50000"/>
@@ -4770,7 +4777,7 @@
           <a:lstStyle/>
           <a:p>
             <a:r>
-              <a:rPr lang="en-US" sz="1400" dirty="0">
+              <a:rPr lang="en-US" sz="1400">
                 <a:solidFill>
                   <a:schemeClr val="bg1">
                     <a:lumMod val="50000"/>
@@ -4781,7 +4788,7 @@
             </a:r>
           </a:p>
           <a:p>
-            <a:endParaRPr lang="en-US" sz="1400" b="1" dirty="0">
+            <a:endParaRPr lang="en-US" sz="1400" b="1">
               <a:solidFill>
                 <a:schemeClr val="bg1">
                   <a:lumMod val="50000"/>
@@ -4791,7 +4798,7 @@
           </a:p>
           <a:p>
             <a:r>
-              <a:rPr lang="en-US" sz="1400" dirty="0">
+              <a:rPr lang="en-US" sz="1400">
                 <a:solidFill>
                   <a:srgbClr val="FF0000"/>
                 </a:solidFill>
@@ -4800,7 +4807,7 @@
             </a:r>
           </a:p>
           <a:p>
-            <a:endParaRPr lang="en-US" sz="1400" b="1" dirty="0">
+            <a:endParaRPr lang="en-US" sz="1400" b="1">
               <a:solidFill>
                 <a:schemeClr val="bg1">
                   <a:lumMod val="50000"/>
@@ -4810,7 +4817,7 @@
           </a:p>
           <a:p>
             <a:r>
-              <a:rPr lang="en-US" sz="1400" b="1" dirty="0">
+              <a:rPr lang="en-US" sz="1400" b="1">
                 <a:solidFill>
                   <a:schemeClr val="bg1">
                     <a:lumMod val="50000"/>
@@ -4820,7 +4827,7 @@
               <a:t>Project Documentation:</a:t>
             </a:r>
             <a:r>
-              <a:rPr lang="en-US" sz="1400" dirty="0">
+              <a:rPr lang="en-US" sz="1400">
                 <a:solidFill>
                   <a:schemeClr val="bg1">
                     <a:lumMod val="50000"/>
@@ -4832,7 +4839,7 @@
           </a:p>
           <a:p>
             <a:r>
-              <a:rPr lang="en-US" sz="1400" b="1" dirty="0">
+              <a:rPr lang="en-US" sz="1400" b="1">
                 <a:solidFill>
                   <a:schemeClr val="bg1">
                     <a:lumMod val="50000"/>
@@ -4842,7 +4849,7 @@
               <a:t>High-Level Architecture Diagram:</a:t>
             </a:r>
             <a:r>
-              <a:rPr lang="en-US" sz="1400" dirty="0">
+              <a:rPr lang="en-US" sz="1400">
                 <a:solidFill>
                   <a:schemeClr val="bg1">
                     <a:lumMod val="50000"/>
@@ -4854,7 +4861,7 @@
           </a:p>
           <a:p>
             <a:r>
-              <a:rPr lang="en-US" sz="1400" b="1" dirty="0">
+              <a:rPr lang="en-US" sz="1400" b="1">
                 <a:solidFill>
                   <a:schemeClr val="bg1">
                     <a:lumMod val="50000"/>
@@ -4864,7 +4871,7 @@
               <a:t>Key Contacts:</a:t>
             </a:r>
             <a:r>
-              <a:rPr lang="en-US" sz="1400" dirty="0">
+              <a:rPr lang="en-US" sz="1400">
                 <a:solidFill>
                   <a:schemeClr val="bg1">
                     <a:lumMod val="50000"/>
@@ -4874,9 +4881,9 @@
               <a:t> List key contacts who can address any questions or concerns that were not covered during the presentation or in the Concerns/Follow-Up section.</a:t>
             </a:r>
             <a:br>
-              <a:rPr lang="en-US" dirty="0"/>
+              <a:rPr lang="en-US"/>
             </a:br>
-            <a:endParaRPr kumimoji="0" lang="en-US" sz="1400" b="0" i="0" u="none" strike="noStrike" kern="1200" cap="none" spc="0" normalizeH="0" baseline="0" noProof="0" dirty="0">
+            <a:endParaRPr kumimoji="0" lang="en-US" sz="1400" b="0" i="0" u="none" strike="noStrike" kern="1200" cap="none" spc="0" normalizeH="0" baseline="0" noProof="0">
               <a:ln>
                 <a:noFill/>
               </a:ln>
@@ -4910,7 +4917,7 @@
               <a:defRPr/>
             </a:pPr>
             <a:r>
-              <a:rPr kumimoji="0" lang="en-US" sz="1100" b="0" i="1" u="none" strike="noStrike" kern="1200" cap="none" spc="0" normalizeH="0" baseline="0" noProof="0" dirty="0">
+              <a:rPr kumimoji="0" lang="en-US" sz="1100" b="0" i="1" u="none" strike="noStrike" kern="1200" cap="none" spc="0" normalizeH="0" baseline="0" noProof="0">
                 <a:ln>
                   <a:noFill/>
                 </a:ln>
@@ -8807,7 +8814,7 @@
                   <a:tabLst/>
                   <a:defRPr/>
                 </a:pPr>
-                <a:endParaRPr kumimoji="0" lang="en-US" sz="1600" b="0" i="1" u="none" strike="noStrike" kern="0" cap="none" spc="0" normalizeH="0" baseline="0" noProof="0" dirty="0">
+                <a:endParaRPr kumimoji="0" lang="en-US" sz="1600" b="0" i="1" u="none" strike="noStrike" kern="0" cap="none" spc="0" normalizeH="0" baseline="0" noProof="0">
                   <a:ln>
                     <a:noFill/>
                   </a:ln>
@@ -13803,7 +13810,7 @@
           <a:lstStyle/>
           <a:p>
             <a:r>
-              <a:rPr lang="en-US" dirty="0"/>
+              <a:rPr lang="en-US"/>
               <a:t>EPIC: Enterprise Pipeline for Infrastructure and Cloud</a:t>
             </a:r>
           </a:p>
@@ -13831,7 +13838,7 @@
           <a:lstStyle/>
           <a:p>
             <a:r>
-              <a:rPr lang="en-US" dirty="0"/>
+              <a:rPr lang="en-US"/>
               <a:t>Virtual Meeting Safety</a:t>
             </a:r>
           </a:p>
@@ -13889,12 +13896,12 @@
           <a:lstStyle/>
           <a:p>
             <a:r>
-              <a:rPr lang="en-US" dirty="0"/>
+              <a:rPr lang="en-US"/>
               <a:t>EPIC: Enterprise Pipeline for Infrastructure and Cloud</a:t>
             </a:r>
           </a:p>
           <a:p>
-            <a:endParaRPr lang="en-US" dirty="0"/>
+            <a:endParaRPr lang="en-US"/>
           </a:p>
         </p:txBody>
       </p:sp>
@@ -13920,7 +13927,7 @@
           <a:lstStyle/>
           <a:p>
             <a:r>
-              <a:rPr lang="en-US" dirty="0"/>
+              <a:rPr lang="en-US"/>
               <a:t>Agenda</a:t>
             </a:r>
           </a:p>
@@ -13986,7 +13993,7 @@
                     <a:lstStyle/>
                     <a:p>
                       <a:r>
-                        <a:rPr lang="en-US" dirty="0"/>
+                        <a:rPr lang="en-US"/>
                         <a:t>Safety, Goals, and Ground Rules</a:t>
                       </a:r>
                     </a:p>
@@ -14030,7 +14037,7 @@
                     <a:lstStyle/>
                     <a:p>
                       <a:r>
-                        <a:rPr lang="en-US" dirty="0"/>
+                        <a:rPr lang="en-US"/>
                         <a:t>5 minutes</a:t>
                       </a:r>
                     </a:p>
@@ -14074,7 +14081,7 @@
                     <a:lstStyle/>
                     <a:p>
                       <a:r>
-                        <a:rPr lang="en-US" dirty="0"/>
+                        <a:rPr lang="en-US"/>
                         <a:t>Michael Hansen</a:t>
                       </a:r>
                     </a:p>
@@ -14128,7 +14135,6 @@
                         <a:rPr lang="en-US"/>
                         <a:t>Problem Statement</a:t>
                       </a:r>
-                      <a:endParaRPr lang="en-US" dirty="0"/>
                     </a:p>
                   </a:txBody>
                   <a:tcPr>
@@ -14174,7 +14180,7 @@
                     <a:lstStyle/>
                     <a:p>
                       <a:r>
-                        <a:rPr lang="en-US" dirty="0"/>
+                        <a:rPr lang="en-US"/>
                         <a:t>5 minutes</a:t>
                       </a:r>
                     </a:p>
@@ -14222,7 +14228,7 @@
                     <a:lstStyle/>
                     <a:p>
                       <a:r>
-                        <a:rPr lang="en-US" dirty="0"/>
+                        <a:rPr lang="en-US"/>
                         <a:t>Travis Hayes</a:t>
                       </a:r>
                     </a:p>
@@ -14277,7 +14283,7 @@
                     <a:lstStyle/>
                     <a:p>
                       <a:r>
-                        <a:rPr lang="en-US" dirty="0"/>
+                        <a:rPr lang="en-US"/>
                         <a:t>Key Requirements Impacting Design</a:t>
                       </a:r>
                     </a:p>
@@ -14325,7 +14331,7 @@
                     <a:lstStyle/>
                     <a:p>
                       <a:r>
-                        <a:rPr lang="en-US" dirty="0"/>
+                        <a:rPr lang="en-US"/>
                         <a:t>5 minutes</a:t>
                       </a:r>
                     </a:p>
@@ -14373,7 +14379,7 @@
                     <a:lstStyle/>
                     <a:p>
                       <a:r>
-                        <a:rPr lang="en-US" dirty="0"/>
+                        <a:rPr lang="en-US"/>
                         <a:t>Robb Morgan</a:t>
                       </a:r>
                     </a:p>
@@ -14445,7 +14451,7 @@
                         <a:defRPr/>
                       </a:pPr>
                       <a:r>
-                        <a:rPr lang="en-US" dirty="0"/>
+                        <a:rPr lang="en-US"/>
                         <a:t>Target State / High-Level Architecture Review</a:t>
                       </a:r>
                     </a:p>
@@ -14493,7 +14499,7 @@
                     <a:lstStyle/>
                     <a:p>
                       <a:r>
-                        <a:rPr lang="en-US" dirty="0"/>
+                        <a:rPr lang="en-US"/>
                         <a:t>20 minutes</a:t>
                       </a:r>
                     </a:p>
@@ -14541,7 +14547,7 @@
                     <a:lstStyle/>
                     <a:p>
                       <a:r>
-                        <a:rPr lang="en-US" dirty="0"/>
+                        <a:rPr lang="en-US"/>
                         <a:t>Robb Morgan</a:t>
                       </a:r>
                     </a:p>
@@ -14596,7 +14602,7 @@
                     <a:lstStyle/>
                     <a:p>
                       <a:r>
-                        <a:rPr lang="en-US" dirty="0"/>
+                        <a:rPr lang="en-US"/>
                         <a:t>Concerns/Follow-Ups</a:t>
                       </a:r>
                     </a:p>
@@ -14640,7 +14646,7 @@
                     <a:lstStyle/>
                     <a:p>
                       <a:r>
-                        <a:rPr lang="en-US" dirty="0"/>
+                        <a:rPr lang="en-US"/>
                         <a:t>5 minutes</a:t>
                       </a:r>
                     </a:p>
@@ -14701,12 +14707,12 @@
                         <a:defRPr/>
                       </a:pPr>
                       <a:r>
-                        <a:rPr lang="en-US" dirty="0"/>
+                        <a:rPr lang="en-US"/>
                         <a:t>Michael Hansen</a:t>
                       </a:r>
                     </a:p>
                     <a:p>
-                      <a:endParaRPr lang="en-US" dirty="0"/>
+                      <a:endParaRPr lang="en-US"/>
                     </a:p>
                   </a:txBody>
                   <a:tcPr>
@@ -14842,7 +14848,7 @@
             <a:lstStyle/>
             <a:p>
               <a:r>
-                <a:rPr lang="en-US" sz="1200" dirty="0">
+                <a:rPr lang="en-US" sz="1200">
                   <a:solidFill>
                     <a:srgbClr val="0089C4"/>
                   </a:solidFill>
@@ -14902,7 +14908,7 @@
             <a:p>
               <a:pPr algn="ctr"/>
               <a:r>
-                <a:rPr lang="en-US" dirty="0"/>
+                <a:rPr lang="en-US"/>
                 <a:t>On Time &amp; On Purpose</a:t>
               </a:r>
             </a:p>
@@ -14992,7 +14998,7 @@
             <a:lstStyle/>
             <a:p>
               <a:r>
-                <a:rPr lang="en-US" sz="1200" dirty="0">
+                <a:rPr lang="en-US" sz="1200">
                   <a:solidFill>
                     <a:srgbClr val="49735D"/>
                   </a:solidFill>
@@ -15054,7 +15060,7 @@
             <a:p>
               <a:pPr algn="ctr"/>
               <a:r>
-                <a:rPr lang="en-US" dirty="0"/>
+                <a:rPr lang="en-US"/>
                 <a:t>Ask Questions (in chat)</a:t>
               </a:r>
             </a:p>
@@ -15115,12 +15121,12 @@
           <a:lstStyle/>
           <a:p>
             <a:r>
-              <a:rPr lang="en-US" dirty="0"/>
+              <a:rPr lang="en-US"/>
               <a:t>EPIC: Enterprise Pipeline for Infrastructure and Cloud</a:t>
             </a:r>
           </a:p>
           <a:p>
-            <a:endParaRPr lang="en-US" dirty="0"/>
+            <a:endParaRPr lang="en-US"/>
           </a:p>
         </p:txBody>
       </p:sp>
@@ -15146,7 +15152,7 @@
           <a:lstStyle/>
           <a:p>
             <a:r>
-              <a:rPr lang="en-US" dirty="0"/>
+              <a:rPr lang="en-US"/>
               <a:t>Ground Rules</a:t>
             </a:r>
           </a:p>
@@ -15206,7 +15212,7 @@
             <a:lstStyle/>
             <a:p>
               <a:r>
-                <a:rPr lang="en-US" sz="1200" dirty="0">
+                <a:rPr lang="en-US" sz="1200">
                   <a:solidFill>
                     <a:srgbClr val="ED9A2D"/>
                   </a:solidFill>
@@ -15263,7 +15269,7 @@
             <a:p>
               <a:pPr algn="ctr"/>
               <a:r>
-                <a:rPr lang="en-US" dirty="0"/>
+                <a:rPr lang="en-US"/>
                 <a:t>Be Supportive</a:t>
               </a:r>
             </a:p>
@@ -15354,7 +15360,7 @@
             <a:lstStyle/>
             <a:p>
               <a:r>
-                <a:rPr lang="en-US" sz="1200" dirty="0">
+                <a:rPr lang="en-US" sz="1200">
                   <a:solidFill>
                     <a:srgbClr val="A1893D"/>
                   </a:solidFill>
@@ -15414,7 +15420,7 @@
             <a:p>
               <a:pPr algn="ctr"/>
               <a:r>
-                <a:rPr lang="en-US" dirty="0"/>
+                <a:rPr lang="en-US"/>
                 <a:t>We Are Here To Learn</a:t>
               </a:r>
             </a:p>
@@ -16434,7 +16440,7 @@
           <a:lstStyle/>
           <a:p>
             <a:r>
-              <a:rPr lang="en-US" dirty="0"/>
+              <a:rPr lang="en-US"/>
               <a:t>EPIC: Enterprise Pipeline for Infrastructure and Cloud</a:t>
             </a:r>
           </a:p>
@@ -17368,12 +17374,12 @@
           <a:lstStyle/>
           <a:p>
             <a:r>
-              <a:rPr lang="en-US" dirty="0"/>
+              <a:rPr lang="en-US"/>
               <a:t>EPIC: Enterprise Pipeline for Infrastructure and Cloud</a:t>
             </a:r>
           </a:p>
           <a:p>
-            <a:endParaRPr lang="en-US" dirty="0"/>
+            <a:endParaRPr lang="en-US"/>
           </a:p>
         </p:txBody>
       </p:sp>
@@ -17399,7 +17405,7 @@
           <a:lstStyle/>
           <a:p>
             <a:r>
-              <a:rPr lang="en-US" dirty="0"/>
+              <a:rPr lang="en-US"/>
               <a:t>Key Requirements Impacting the Design</a:t>
             </a:r>
           </a:p>
@@ -17455,7 +17461,7 @@
             </a:pPr>
             <a:r>
               <a:rPr lang="en-US" sz="1200" dirty="0"/>
-              <a:t>Centralized Pipeline — one ADO framework adopted by every PG&amp;E app team. As a regulated utility, consistent security, audit, and governance controls are mandatory across every workload — not optional per-team choices.</a:t>
+              <a:t>Universal Pipeline — one ADO framework adopted by every PG&amp;E app team. As a regulated utility, consistent security, audit, and governance controls are mandatory across every workload — not optional per-team choices.</a:t>
             </a:r>
           </a:p>
           <a:p>
@@ -17468,7 +17474,15 @@
             </a:pPr>
             <a:r>
               <a:rPr lang="en-US" sz="1200" dirty="0"/>
-              <a:t>Single contract per app — every team onboards via .pipeline/epic.json; the contract drives stage selection (Build · Test · Scan · Infra · Deploy · Integration) and infrastructure provisioning.</a:t>
+              <a:t>Single contract per app — every team onboards via .pipeline/</a:t>
+            </a:r>
+            <a:r>
+              <a:rPr lang="en-US" sz="1200" dirty="0" err="1"/>
+              <a:t>epic.json</a:t>
+            </a:r>
+            <a:r>
+              <a:rPr lang="en-US" sz="1200" dirty="0"/>
+              <a:t>; the contract drives stage selection (Build · Test · Scan · Infra · Deploy · Integration) and infrastructure provisioning.</a:t>
             </a:r>
           </a:p>
           <a:p>
@@ -17481,7 +17495,7 @@
             </a:pPr>
             <a:r>
               <a:rPr lang="en-US" sz="1200" dirty="0"/>
-              <a:t>Multi-cloud deployment — one pipeline targets AWS, Azure, and SAP BTP based on cloud.* in the contract.</a:t>
+              <a:t>Multi-cloud deployment — one pipeline targets AWS, Azure, Azure Local, and SAP BTP based on cloud.* in the contract.</a:t>
             </a:r>
           </a:p>
           <a:p>
@@ -17507,7 +17521,15 @@
             </a:pPr>
             <a:r>
               <a:rPr lang="en-US" sz="1200" dirty="0"/>
-              <a:t>Per-app, per-environment infrastructure — Terraform .infra/ provisioned through reusable pgetech/epic-pipeline-modules.</a:t>
+              <a:t>Per-app, per-environment infrastructure — Terraform .infra/ provisioned through reusable </a:t>
+            </a:r>
+            <a:r>
+              <a:rPr lang="en-US" sz="1200" dirty="0" err="1"/>
+              <a:t>pgetech</a:t>
+            </a:r>
+            <a:r>
+              <a:rPr lang="en-US" sz="1200" dirty="0"/>
+              <a:t>/epic-pipeline-modules.</a:t>
             </a:r>
           </a:p>
         </p:txBody>
@@ -17541,7 +17563,7 @@
           <a:lstStyle/>
           <a:p>
             <a:r>
-              <a:rPr lang="en-US" sz="1800" b="1" dirty="0">
+              <a:rPr lang="en-US" sz="1800" b="1">
                 <a:solidFill>
                   <a:schemeClr val="tx2"/>
                 </a:solidFill>
@@ -17550,7 +17572,7 @@
             </a:r>
           </a:p>
           <a:p>
-            <a:endParaRPr lang="en-US" dirty="0"/>
+            <a:endParaRPr lang="en-US"/>
           </a:p>
           <a:p>
             <a:pPr marL="342900" indent="-342900">
@@ -17561,7 +17583,7 @@
               <a:buAutoNum type="arabicPeriod"/>
             </a:pPr>
             <a:r>
-              <a:rPr lang="en-US" sz="1200" dirty="0"/>
+              <a:rPr lang="en-US" sz="1200"/>
               <a:t>Security — mandatory Wiz / SonarQube scans · AWS Secrets Manager for all creds · no long-lived cloud keys on agents.</a:t>
             </a:r>
           </a:p>
@@ -17574,7 +17596,7 @@
               <a:buAutoNum type="arabicPeriod"/>
             </a:pPr>
             <a:r>
-              <a:rPr lang="en-US" sz="1200" dirty="0"/>
+              <a:rPr lang="en-US" sz="1200"/>
               <a:t>Auditability / FinOps — every Engine build tagged: epicRepo · epicAppName · epicAppType · epicEnvironment · epicCloud.</a:t>
             </a:r>
           </a:p>
@@ -17587,7 +17609,7 @@
               <a:buAutoNum type="arabicPeriod"/>
             </a:pPr>
             <a:r>
-              <a:rPr lang="en-US" sz="1200" dirty="0"/>
+              <a:rPr lang="en-US" sz="1200"/>
               <a:t>Governance &amp; SoD — ManualValidation@0 approval gate driven by approvalEnvironments[] per environment.</a:t>
             </a:r>
           </a:p>
@@ -17600,7 +17622,7 @@
               <a:buAutoNum type="arabicPeriod"/>
             </a:pPr>
             <a:r>
-              <a:rPr lang="en-US" sz="1200" dirty="0"/>
+              <a:rPr lang="en-US" sz="1200"/>
               <a:t>Maintainability — centralized orchestrator + engine + stage templates; one repo to fix, every team benefits.</a:t>
             </a:r>
           </a:p>
@@ -17613,7 +17635,7 @@
               <a:buAutoNum type="arabicPeriod"/>
             </a:pPr>
             <a:r>
-              <a:rPr lang="en-US" sz="1200" dirty="0"/>
+              <a:rPr lang="en-US" sz="1200"/>
               <a:t>Network compliance — internal ALB w/ PG&amp;E corp CIDR ingress · CCOE-managed VPC · private Route 53 zones.</a:t>
             </a:r>
           </a:p>
@@ -17712,7 +17734,7 @@
           <a:lstStyle/>
           <a:p>
             <a:r>
-              <a:rPr lang="en-US" dirty="0"/>
+              <a:rPr lang="en-US"/>
               <a:t>EPIC: Enterprise Pipeline for Infrastructure and Cloud</a:t>
             </a:r>
           </a:p>
@@ -20676,12 +20698,12 @@
           <a:lstStyle/>
           <a:p>
             <a:r>
-              <a:rPr lang="en-US" dirty="0"/>
+              <a:rPr lang="en-US"/>
               <a:t>EPIC: Enterprise Pipeline for Infrastructure and Cloud</a:t>
             </a:r>
           </a:p>
           <a:p>
-            <a:endParaRPr lang="en-US" dirty="0"/>
+            <a:endParaRPr lang="en-US"/>
           </a:p>
         </p:txBody>
       </p:sp>
@@ -20707,7 +20729,7 @@
           <a:lstStyle/>
           <a:p>
             <a:r>
-              <a:rPr lang="en-US" dirty="0"/>
+              <a:rPr lang="en-US"/>
               <a:t>High-Level Architecture Diagram</a:t>
             </a:r>
           </a:p>
@@ -20715,10 +20737,10 @@
       </p:sp>
       <p:pic>
         <p:nvPicPr>
-          <p:cNvPr id="7" name="Picture 6">
+          <p:cNvPr id="4" name="Picture 3">
             <a:extLst>
               <a:ext uri="{FF2B5EF4-FFF2-40B4-BE49-F238E27FC236}">
-                <a16:creationId xmlns:a16="http://schemas.microsoft.com/office/drawing/2014/main" id="{B1F14C3C-87A5-CD99-DE06-1AB4792E4885}"/>
+                <a16:creationId xmlns:a16="http://schemas.microsoft.com/office/drawing/2014/main" id="{C0E7E8A8-FB39-DA10-4CCE-03C405E9EFE1}"/>
               </a:ext>
             </a:extLst>
           </p:cNvPr>
@@ -20735,8 +20757,8 @@
         </p:blipFill>
         <p:spPr>
           <a:xfrm>
-            <a:off x="843169" y="728829"/>
-            <a:ext cx="10505661" cy="5865630"/>
+            <a:off x="1007060" y="815617"/>
+            <a:ext cx="10177880" cy="5679138"/>
           </a:xfrm>
           <a:prstGeom prst="rect">
             <a:avLst/>
@@ -20801,12 +20823,12 @@
           <a:lstStyle/>
           <a:p>
             <a:r>
-              <a:rPr lang="en-US" dirty="0"/>
+              <a:rPr lang="en-US"/>
               <a:t>EPIC: Enterprise Pipeline for Infrastructure and Cloud</a:t>
             </a:r>
           </a:p>
           <a:p>
-            <a:endParaRPr lang="en-US" dirty="0"/>
+            <a:endParaRPr lang="en-US"/>
           </a:p>
         </p:txBody>
       </p:sp>
@@ -20832,7 +20854,7 @@
           <a:lstStyle/>
           <a:p>
             <a:r>
-              <a:rPr lang="en-US" dirty="0"/>
+              <a:rPr lang="en-US"/>
               <a:t>Concerns / Follow-Ups</a:t>
             </a:r>
           </a:p>
@@ -20868,18 +20890,18 @@
           <a:p>
             <a:pPr algn="ctr"/>
             <a:r>
-              <a:rPr lang="en-US" sz="2400" dirty="0"/>
+              <a:rPr lang="en-US" sz="2400"/>
               <a:t>Are there any concerns with the architecture that you would like to have a follow-up conversation with the Solution Architect?  </a:t>
             </a:r>
           </a:p>
           <a:p>
             <a:pPr algn="ctr"/>
-            <a:endParaRPr lang="en-US" dirty="0"/>
+            <a:endParaRPr lang="en-US"/>
           </a:p>
           <a:p>
             <a:pPr algn="ctr"/>
             <a:r>
-              <a:rPr lang="en-US" sz="1400" i="1" dirty="0">
+              <a:rPr lang="en-US" sz="1400" i="1">
                 <a:solidFill>
                   <a:schemeClr val="bg1">
                     <a:lumMod val="50000"/>
@@ -21565,6 +21587,6 @@
 
 <file path=docMetadata/LabelInfo.xml><?xml version="1.0" encoding="utf-8"?>
 <clbl:labelList xmlns:clbl="http://schemas.microsoft.com/office/2020/mipLabelMetadata">
-  <clbl:label id="{6b0d6fe9-5d6a-4bc0-a54c-bcad7a1ba9de}" enabled="1" method="Privileged" siteId="{44ae661a-ece6-41aa-bc96-7c2c85a08941}" removed="0"/>
+  <clbl:label id="{6b0d6fe9-5d6a-4bc0-a54c-bcad7a1ba9de}" enabled="1" method="Privileged" siteId="{44ae661a-ece6-41aa-bc96-7c2c85a08941}" contentBits="0" removed="0"/>
 </clbl:labelList>
 </file>
--- a/documents/Peer Review - EPIC.pptx
+++ b/documents/Peer Review - EPIC.pptx
@@ -116,6 +116,11 @@
       </a:defRPr>
     </a:lvl9pPr>
   </p:defaultTextStyle>
+  <p:extLst>
+    <p:ext uri="{EFAFB233-063F-42B5-8137-9DF3F51BA10A}">
+      <p15:sldGuideLst xmlns:p15="http://schemas.microsoft.com/office/powerpoint/2012/main"/>
+    </p:ext>
+  </p:extLst>
 </p:presentation>
 </file>
 
@@ -123,7 +128,7 @@
 <p1510:revInfo xmlns:a="http://schemas.openxmlformats.org/drawingml/2006/main" xmlns:r="http://schemas.openxmlformats.org/officeDocument/2006/relationships" xmlns:p1510="http://schemas.microsoft.com/office/powerpoint/2015/10/main">
   <p1510:revLst>
     <p1510:client id="{121215A5-E84B-6533-00E7-C3A7218C8746}" v="3" dt="2026-06-08T17:34:00.339"/>
-    <p1510:client id="{5294F365-9EC1-CA44-B273-2A43E747F6C3}" v="37" dt="2026-06-08T19:29:40.841"/>
+    <p1510:client id="{5294F365-9EC1-CA44-B273-2A43E747F6C3}" v="44" dt="2026-06-08T21:44:16.857"/>
   </p1510:revLst>
 </p1510:revInfo>
 </file>
@@ -133,7 +138,7 @@
   <pc:docChgLst>
     <pc:chgData name="Morgan, Robb" userId="6e49e175-ae62-4b25-a9b8-980198524bb0" providerId="ADAL" clId="{815032F7-E4C2-5F74-92C0-8B55A1DE40FC}"/>
     <pc:docChg chg="undo custSel delSld modSld">
-      <pc:chgData name="Morgan, Robb" userId="6e49e175-ae62-4b25-a9b8-980198524bb0" providerId="ADAL" clId="{815032F7-E4C2-5F74-92C0-8B55A1DE40FC}" dt="2026-06-08T19:29:47.715" v="226" actId="1076"/>
+      <pc:chgData name="Morgan, Robb" userId="6e49e175-ae62-4b25-a9b8-980198524bb0" providerId="ADAL" clId="{815032F7-E4C2-5F74-92C0-8B55A1DE40FC}" dt="2026-06-08T21:44:19.121" v="373" actId="20577"/>
       <pc:docMkLst>
         <pc:docMk/>
       </pc:docMkLst>
@@ -245,6 +250,21 @@
           </ac:picMkLst>
         </pc:picChg>
       </pc:sldChg>
+      <pc:sldChg chg="modSp mod">
+        <pc:chgData name="Morgan, Robb" userId="6e49e175-ae62-4b25-a9b8-980198524bb0" providerId="ADAL" clId="{815032F7-E4C2-5F74-92C0-8B55A1DE40FC}" dt="2026-06-08T20:24:06.174" v="312" actId="20577"/>
+        <pc:sldMkLst>
+          <pc:docMk/>
+          <pc:sldMk cId="1087899392" sldId="261"/>
+        </pc:sldMkLst>
+        <pc:spChg chg="mod">
+          <ac:chgData name="Morgan, Robb" userId="6e49e175-ae62-4b25-a9b8-980198524bb0" providerId="ADAL" clId="{815032F7-E4C2-5F74-92C0-8B55A1DE40FC}" dt="2026-06-08T20:24:06.174" v="312" actId="20577"/>
+          <ac:spMkLst>
+            <pc:docMk/>
+            <pc:sldMk cId="1087899392" sldId="261"/>
+            <ac:spMk id="3" creationId="{4C38B454-A478-6480-FE4D-CC779D0CDE81}"/>
+          </ac:spMkLst>
+        </pc:spChg>
+      </pc:sldChg>
       <pc:sldChg chg="modSp">
         <pc:chgData name="Morgan, Robb" userId="6e49e175-ae62-4b25-a9b8-980198524bb0" providerId="ADAL" clId="{815032F7-E4C2-5F74-92C0-8B55A1DE40FC}" dt="2026-06-08T18:02:14.697" v="109"/>
         <pc:sldMkLst>
@@ -320,12 +340,36 @@
           </ac:spMkLst>
         </pc:spChg>
       </pc:sldChg>
-      <pc:sldChg chg="modSp mod">
-        <pc:chgData name="Morgan, Robb" userId="6e49e175-ae62-4b25-a9b8-980198524bb0" providerId="ADAL" clId="{815032F7-E4C2-5F74-92C0-8B55A1DE40FC}" dt="2026-06-08T18:08:00.970" v="174" actId="113"/>
+      <pc:sldChg chg="delSp modSp mod">
+        <pc:chgData name="Morgan, Robb" userId="6e49e175-ae62-4b25-a9b8-980198524bb0" providerId="ADAL" clId="{815032F7-E4C2-5F74-92C0-8B55A1DE40FC}" dt="2026-06-08T21:44:19.121" v="373" actId="20577"/>
         <pc:sldMkLst>
           <pc:docMk/>
           <pc:sldMk cId="500213301" sldId="1579"/>
         </pc:sldMkLst>
+        <pc:spChg chg="mod">
+          <ac:chgData name="Morgan, Robb" userId="6e49e175-ae62-4b25-a9b8-980198524bb0" providerId="ADAL" clId="{815032F7-E4C2-5F74-92C0-8B55A1DE40FC}" dt="2026-06-08T20:25:38.106" v="368" actId="20577"/>
+          <ac:spMkLst>
+            <pc:docMk/>
+            <pc:sldMk cId="500213301" sldId="1579"/>
+            <ac:spMk id="10" creationId="{CE3AFF28-F957-4403-77AD-ED0D2D2469C5}"/>
+          </ac:spMkLst>
+        </pc:spChg>
+        <pc:spChg chg="mod">
+          <ac:chgData name="Morgan, Robb" userId="6e49e175-ae62-4b25-a9b8-980198524bb0" providerId="ADAL" clId="{815032F7-E4C2-5F74-92C0-8B55A1DE40FC}" dt="2026-06-08T21:44:19.121" v="373" actId="20577"/>
+          <ac:spMkLst>
+            <pc:docMk/>
+            <pc:sldMk cId="500213301" sldId="1579"/>
+            <ac:spMk id="11" creationId="{508156BA-5B71-4823-B470-934D62A4E5F3}"/>
+          </ac:spMkLst>
+        </pc:spChg>
+        <pc:spChg chg="del mod">
+          <ac:chgData name="Morgan, Robb" userId="6e49e175-ae62-4b25-a9b8-980198524bb0" providerId="ADAL" clId="{815032F7-E4C2-5F74-92C0-8B55A1DE40FC}" dt="2026-06-08T20:25:59.739" v="369" actId="478"/>
+          <ac:spMkLst>
+            <pc:docMk/>
+            <pc:sldMk cId="500213301" sldId="1579"/>
+            <ac:spMk id="12" creationId="{2E718521-ED89-4586-33A0-D5F7CB2EA11F}"/>
+          </ac:spMkLst>
+        </pc:spChg>
         <pc:spChg chg="mod">
           <ac:chgData name="Morgan, Robb" userId="6e49e175-ae62-4b25-a9b8-980198524bb0" providerId="ADAL" clId="{815032F7-E4C2-5F74-92C0-8B55A1DE40FC}" dt="2026-06-08T18:08:00.970" v="174" actId="113"/>
           <ac:spMkLst>
@@ -4132,8 +4176,8 @@
           <a:lstStyle/>
           <a:p>
             <a:r>
-              <a:rPr lang="en-US" sz="2400"/>
-              <a:t>Robb Morgan</a:t>
+              <a:rPr lang="en-US" sz="2400" dirty="0"/>
+              <a:t>Travis Hayes / Robb Morgan</a:t>
             </a:r>
           </a:p>
         </p:txBody>
@@ -4165,43 +4209,9 @@
           <a:lstStyle/>
           <a:p>
             <a:r>
-              <a:rPr lang="en-US"/>
-              <a:t>IT Solutions Engineer</a:t>
+              <a:rPr lang="en-US" dirty="0"/>
+              <a:t>Senior Manager, IT Architecture / IT Solutions Engineer</a:t>
             </a:r>
-          </a:p>
-        </p:txBody>
-      </p:sp>
-      <p:sp>
-        <p:nvSpPr>
-          <p:cNvPr id="12" name="Text Placeholder 11">
-            <a:extLst>
-              <a:ext uri="{FF2B5EF4-FFF2-40B4-BE49-F238E27FC236}">
-                <a16:creationId xmlns:a16="http://schemas.microsoft.com/office/drawing/2014/main" id="{2E718521-ED89-4586-33A0-D5F7CB2EA11F}"/>
-              </a:ext>
-            </a:extLst>
-          </p:cNvPr>
-          <p:cNvSpPr>
-            <a:spLocks noGrp="1"/>
-          </p:cNvSpPr>
-          <p:nvPr>
-            <p:ph type="body" sz="quarter" idx="13"/>
-          </p:nvPr>
-        </p:nvSpPr>
-        <p:spPr>
-          <a:xfrm>
-            <a:off x="2086642" y="6085696"/>
-            <a:ext cx="5148566" cy="378725"/>
-          </a:xfrm>
-        </p:spPr>
-        <p:txBody>
-          <a:bodyPr/>
-          <a:lstStyle/>
-          <a:p>
-            <a:r>
-              <a:rPr lang="en-US" err="1"/>
-              <a:t>CCoE</a:t>
-            </a:r>
-            <a:endParaRPr lang="en-US"/>
           </a:p>
         </p:txBody>
       </p:sp>
@@ -4290,41 +4300,41 @@
           <a:lstStyle/>
           <a:p>
             <a:r>
-              <a:rPr lang="en-US"/>
+              <a:rPr lang="en-US" dirty="0"/>
               <a:t>EPIC</a:t>
             </a:r>
           </a:p>
           <a:p>
             <a:r>
-              <a:rPr lang="en-US" sz="2400" b="1"/>
+              <a:rPr lang="en-US" sz="2400" b="1" dirty="0"/>
               <a:t>E</a:t>
             </a:r>
             <a:r>
-              <a:rPr lang="en-US" sz="2400"/>
+              <a:rPr lang="en-US" sz="2400" dirty="0"/>
               <a:t>nterprise </a:t>
             </a:r>
             <a:r>
-              <a:rPr lang="en-US" sz="2400" b="1"/>
+              <a:rPr lang="en-US" sz="2400" b="1" dirty="0"/>
               <a:t>P</a:t>
             </a:r>
             <a:r>
-              <a:rPr lang="en-US" sz="2400"/>
+              <a:rPr lang="en-US" sz="2400" dirty="0"/>
               <a:t>ipeline for </a:t>
             </a:r>
             <a:r>
-              <a:rPr lang="en-US" sz="2400" b="1"/>
+              <a:rPr lang="en-US" sz="2400" b="1" dirty="0"/>
               <a:t>I</a:t>
             </a:r>
             <a:r>
-              <a:rPr lang="en-US" sz="2400"/>
+              <a:rPr lang="en-US" sz="2400" dirty="0"/>
               <a:t>nfrastructure and </a:t>
             </a:r>
             <a:r>
-              <a:rPr lang="en-US" sz="2400" b="1"/>
+              <a:rPr lang="en-US" sz="2400" b="1" dirty="0"/>
               <a:t>C</a:t>
             </a:r>
             <a:r>
-              <a:rPr lang="en-US" sz="2400"/>
+              <a:rPr lang="en-US" sz="2400" dirty="0"/>
               <a:t>loud</a:t>
             </a:r>
           </a:p>
@@ -4777,18 +4787,65 @@
           <a:lstStyle/>
           <a:p>
             <a:r>
-              <a:rPr lang="en-US" sz="1400">
+              <a:rPr lang="en-US" sz="1400" b="1" dirty="0">
                 <a:solidFill>
                   <a:schemeClr val="bg1">
                     <a:lumMod val="50000"/>
                   </a:schemeClr>
                 </a:solidFill>
               </a:rPr>
-              <a:t>The purpose of this slide is to provide the audience with essential resources to further explore the architecture you have presented. This slide should include:</a:t>
+              <a:t>Project Documentation:</a:t>
+            </a:r>
+            <a:r>
+              <a:rPr lang="en-US" sz="1400" dirty="0">
+                <a:solidFill>
+                  <a:schemeClr val="bg1">
+                    <a:lumMod val="50000"/>
+                  </a:schemeClr>
+                </a:solidFill>
+              </a:rPr>
+              <a:t> </a:t>
             </a:r>
           </a:p>
           <a:p>
-            <a:endParaRPr lang="en-US" sz="1400" b="1">
+            <a:pPr marL="285750" indent="-285750">
+              <a:buFont typeface="Arial" panose="020B0604020202020204" pitchFamily="34" charset="0"/>
+              <a:buChar char="•"/>
+            </a:pPr>
+            <a:r>
+              <a:rPr lang="en-US" sz="1400" dirty="0">
+                <a:solidFill>
+                  <a:schemeClr val="bg1">
+                    <a:lumMod val="50000"/>
+                  </a:schemeClr>
+                </a:solidFill>
+              </a:rPr>
+              <a:t>EPIC Repo: </a:t>
+            </a:r>
+            <a:r>
+              <a:rPr lang="en-US" sz="1400" dirty="0">
+                <a:solidFill>
+                  <a:schemeClr val="bg1">
+                    <a:lumMod val="50000"/>
+                  </a:schemeClr>
+                </a:solidFill>
+                <a:hlinkClick r:id="rId6"/>
+              </a:rPr>
+              <a:t>https://github.com/pgetech/epic-pipeline</a:t>
+            </a:r>
+            <a:r>
+              <a:rPr lang="en-US" sz="1400" dirty="0">
+                <a:solidFill>
+                  <a:schemeClr val="bg1">
+                    <a:lumMod val="50000"/>
+                  </a:schemeClr>
+                </a:solidFill>
+              </a:rPr>
+              <a:t> </a:t>
+            </a:r>
+          </a:p>
+          <a:p>
+            <a:endParaRPr lang="en-US" sz="1400" b="1" dirty="0">
               <a:solidFill>
                 <a:schemeClr val="bg1">
                   <a:lumMod val="50000"/>
@@ -4798,16 +4855,52 @@
           </a:p>
           <a:p>
             <a:r>
-              <a:rPr lang="en-US" sz="1400">
-                <a:solidFill>
-                  <a:srgbClr val="FF0000"/>
+              <a:rPr lang="en-US" sz="1400" b="1" dirty="0">
+                <a:solidFill>
+                  <a:schemeClr val="bg1">
+                    <a:lumMod val="50000"/>
+                  </a:schemeClr>
                 </a:solidFill>
               </a:rPr>
-              <a:t>The Resources slide will not be presented during the presentation agenda.  This slide deck will be added to chat at the conclusion of the Peer Review as a resource for others.</a:t>
+              <a:t>Key Contacts:</a:t>
+            </a:r>
+            <a:r>
+              <a:rPr lang="en-US" sz="1400" dirty="0">
+                <a:solidFill>
+                  <a:schemeClr val="bg1">
+                    <a:lumMod val="50000"/>
+                  </a:schemeClr>
+                </a:solidFill>
+              </a:rPr>
+              <a:t> </a:t>
             </a:r>
           </a:p>
           <a:p>
-            <a:endParaRPr lang="en-US" sz="1400" b="1">
+            <a:pPr marL="285750" indent="-285750">
+              <a:buFont typeface="Arial" panose="020B0604020202020204" pitchFamily="34" charset="0"/>
+              <a:buChar char="•"/>
+            </a:pPr>
+            <a:r>
+              <a:rPr lang="en-US" sz="1400" dirty="0">
+                <a:solidFill>
+                  <a:schemeClr val="bg1">
+                    <a:lumMod val="50000"/>
+                  </a:schemeClr>
+                </a:solidFill>
+              </a:rPr>
+              <a:t>Travis Hayes: </a:t>
+            </a:r>
+            <a:r>
+              <a:rPr lang="en-US" sz="1400" dirty="0" err="1">
+                <a:solidFill>
+                  <a:schemeClr val="bg1">
+                    <a:lumMod val="50000"/>
+                  </a:schemeClr>
+                </a:solidFill>
+              </a:rPr>
+              <a:t>TAHZ@pge.com</a:t>
+            </a:r>
+            <a:endParaRPr lang="en-US" sz="1400" dirty="0">
               <a:solidFill>
                 <a:schemeClr val="bg1">
                   <a:lumMod val="50000"/>
@@ -4816,79 +4909,39 @@
             </a:endParaRPr>
           </a:p>
           <a:p>
+            <a:pPr marL="285750" indent="-285750">
+              <a:buFont typeface="Arial" panose="020B0604020202020204" pitchFamily="34" charset="0"/>
+              <a:buChar char="•"/>
+            </a:pPr>
             <a:r>
-              <a:rPr lang="en-US" sz="1400" b="1">
+              <a:rPr lang="en-US" sz="1400" dirty="0">
                 <a:solidFill>
                   <a:schemeClr val="bg1">
                     <a:lumMod val="50000"/>
                   </a:schemeClr>
                 </a:solidFill>
               </a:rPr>
-              <a:t>Project Documentation:</a:t>
+              <a:t>Robb Morgan: </a:t>
             </a:r>
             <a:r>
-              <a:rPr lang="en-US" sz="1400">
+              <a:rPr lang="en-US" sz="1400" dirty="0" err="1">
                 <a:solidFill>
                   <a:schemeClr val="bg1">
                     <a:lumMod val="50000"/>
                   </a:schemeClr>
                 </a:solidFill>
               </a:rPr>
-              <a:t> Provide links to comprehensive project documentation where detailed information about the architecture and other aspects of the project can be found.</a:t>
-            </a:r>
-          </a:p>
-          <a:p>
-            <a:r>
-              <a:rPr lang="en-US" sz="1400" b="1">
-                <a:solidFill>
-                  <a:schemeClr val="bg1">
-                    <a:lumMod val="50000"/>
-                  </a:schemeClr>
-                </a:solidFill>
-              </a:rPr>
-              <a:t>High-Level Architecture Diagram:</a:t>
-            </a:r>
-            <a:r>
-              <a:rPr lang="en-US" sz="1400">
-                <a:solidFill>
-                  <a:schemeClr val="bg1">
-                    <a:lumMod val="50000"/>
-                  </a:schemeClr>
-                </a:solidFill>
-              </a:rPr>
-              <a:t> Include a link to the High-Level Architecture (HLA) diagram for a visual representation of the design.</a:t>
-            </a:r>
-          </a:p>
-          <a:p>
-            <a:r>
-              <a:rPr lang="en-US" sz="1400" b="1">
-                <a:solidFill>
-                  <a:schemeClr val="bg1">
-                    <a:lumMod val="50000"/>
-                  </a:schemeClr>
-                </a:solidFill>
-              </a:rPr>
-              <a:t>Key Contacts:</a:t>
-            </a:r>
-            <a:r>
-              <a:rPr lang="en-US" sz="1400">
-                <a:solidFill>
-                  <a:schemeClr val="bg1">
-                    <a:lumMod val="50000"/>
-                  </a:schemeClr>
-                </a:solidFill>
-              </a:rPr>
-              <a:t> List key contacts who can address any questions or concerns that were not covered during the presentation or in the Concerns/Follow-Up section.</a:t>
+              <a:t>RHMG@pge.com</a:t>
             </a:r>
             <a:br>
-              <a:rPr lang="en-US"/>
+              <a:rPr lang="en-US" dirty="0"/>
             </a:br>
-            <a:endParaRPr kumimoji="0" lang="en-US" sz="1400" b="0" i="0" u="none" strike="noStrike" kern="1200" cap="none" spc="0" normalizeH="0" baseline="0" noProof="0">
+            <a:endParaRPr kumimoji="0" lang="en-US" sz="1100" b="0" i="1" u="none" strike="noStrike" kern="1200" cap="none" spc="0" normalizeH="0" baseline="0" noProof="0" dirty="0">
               <a:ln>
                 <a:noFill/>
               </a:ln>
               <a:solidFill>
-                <a:srgbClr val="777777"/>
+                <a:srgbClr val="0089C4"/>
               </a:solidFill>
               <a:effectLst/>
               <a:uLnTx/>
@@ -4897,42 +4950,6 @@
               <a:ea typeface="+mn-ea"/>
               <a:cs typeface="+mn-cs"/>
             </a:endParaRPr>
-          </a:p>
-          <a:p>
-            <a:pPr marL="0" marR="0" lvl="0" indent="0" algn="l" defTabSz="457200" rtl="0" eaLnBrk="1" fontAlgn="auto" latinLnBrk="0" hangingPunct="1">
-              <a:lnSpc>
-                <a:spcPct val="100000"/>
-              </a:lnSpc>
-              <a:spcBef>
-                <a:spcPts val="0"/>
-              </a:spcBef>
-              <a:spcAft>
-                <a:spcPts val="0"/>
-              </a:spcAft>
-              <a:buClrTx/>
-              <a:buSzTx/>
-              <a:buFontTx/>
-              <a:buNone/>
-              <a:tabLst/>
-              <a:defRPr/>
-            </a:pPr>
-            <a:r>
-              <a:rPr kumimoji="0" lang="en-US" sz="1100" b="0" i="1" u="none" strike="noStrike" kern="1200" cap="none" spc="0" normalizeH="0" baseline="0" noProof="0">
-                <a:ln>
-                  <a:noFill/>
-                </a:ln>
-                <a:solidFill>
-                  <a:srgbClr val="0089C4"/>
-                </a:solidFill>
-                <a:effectLst/>
-                <a:uLnTx/>
-                <a:uFillTx/>
-                <a:latin typeface="Calibri" panose="020F0502020204030204"/>
-                <a:ea typeface="+mn-ea"/>
-                <a:cs typeface="+mn-cs"/>
-              </a:rPr>
-              <a:t>Please delete this text box once you are clear on the purpose of this slide</a:t>
-            </a:r>
           </a:p>
         </p:txBody>
       </p:sp>

--- a/documents/Peer Review - EPIC.pptx
+++ b/documents/Peer Review - EPIC.pptx
@@ -116,11 +116,6 @@
       </a:defRPr>
     </a:lvl9pPr>
   </p:defaultTextStyle>
-  <p:extLst>
-    <p:ext uri="{EFAFB233-063F-42B5-8137-9DF3F51BA10A}">
-      <p15:sldGuideLst xmlns:p15="http://schemas.microsoft.com/office/powerpoint/2012/main"/>
-    </p:ext>
-  </p:extLst>
 </p:presentation>
 </file>
 
@@ -135,6 +130,52 @@
 
 <file path=ppt/changesInfos/changesInfo1.xml><?xml version="1.0" encoding="utf-8"?>
 <pc:chgInfo xmlns:a="http://schemas.openxmlformats.org/drawingml/2006/main" xmlns:r="http://schemas.openxmlformats.org/officeDocument/2006/relationships" xmlns:ac="http://schemas.microsoft.com/office/drawing/2013/main/command" xmlns:pc="http://schemas.microsoft.com/office/powerpoint/2013/main/command">
+  <pc:docChgLst>
+    <pc:chgData name="Hayes, Travis" userId="S::tahz@pge.com::4b9ddd45-6601-4923-a76c-85a08246e8f6" providerId="AD" clId="Web-{121215A5-E84B-6533-00E7-C3A7218C8746}"/>
+    <pc:docChg chg="addSld modSld">
+      <pc:chgData name="Hayes, Travis" userId="S::tahz@pge.com::4b9ddd45-6601-4923-a76c-85a08246e8f6" providerId="AD" clId="Web-{121215A5-E84B-6533-00E7-C3A7218C8746}" dt="2026-06-08T17:34:00.339" v="2"/>
+      <pc:docMkLst>
+        <pc:docMk/>
+      </pc:docMkLst>
+      <pc:sldChg chg="delSp add">
+        <pc:chgData name="Hayes, Travis" userId="S::tahz@pge.com::4b9ddd45-6601-4923-a76c-85a08246e8f6" providerId="AD" clId="Web-{121215A5-E84B-6533-00E7-C3A7218C8746}" dt="2026-06-08T17:33:12.261" v="1"/>
+        <pc:sldMkLst>
+          <pc:docMk/>
+          <pc:sldMk cId="2597882783" sldId="271"/>
+        </pc:sldMkLst>
+        <pc:spChg chg="del">
+          <ac:chgData name="Hayes, Travis" userId="S::tahz@pge.com::4b9ddd45-6601-4923-a76c-85a08246e8f6" providerId="AD" clId="Web-{121215A5-E84B-6533-00E7-C3A7218C8746}" dt="2026-06-08T17:33:12.261" v="1"/>
+          <ac:spMkLst>
+            <pc:docMk/>
+            <pc:sldMk cId="2597882783" sldId="271"/>
+            <ac:spMk id="6" creationId="{214C2BE7-D030-908A-FB14-B868990EDBB4}"/>
+          </ac:spMkLst>
+        </pc:spChg>
+      </pc:sldChg>
+      <pc:sldChg chg="add">
+        <pc:chgData name="Hayes, Travis" userId="S::tahz@pge.com::4b9ddd45-6601-4923-a76c-85a08246e8f6" providerId="AD" clId="Web-{121215A5-E84B-6533-00E7-C3A7218C8746}" dt="2026-06-08T17:34:00.339" v="2"/>
+        <pc:sldMkLst>
+          <pc:docMk/>
+          <pc:sldMk cId="349043267" sldId="272"/>
+        </pc:sldMkLst>
+      </pc:sldChg>
+      <pc:sldMasterChg chg="addSldLayout">
+        <pc:chgData name="Hayes, Travis" userId="S::tahz@pge.com::4b9ddd45-6601-4923-a76c-85a08246e8f6" providerId="AD" clId="Web-{121215A5-E84B-6533-00E7-C3A7218C8746}" dt="2026-06-08T17:33:04.918" v="0"/>
+        <pc:sldMasterMkLst>
+          <pc:docMk/>
+          <pc:sldMasterMk cId="3475336881" sldId="2147483688"/>
+        </pc:sldMasterMkLst>
+        <pc:sldLayoutChg chg="add">
+          <pc:chgData name="Hayes, Travis" userId="S::tahz@pge.com::4b9ddd45-6601-4923-a76c-85a08246e8f6" providerId="AD" clId="Web-{121215A5-E84B-6533-00E7-C3A7218C8746}" dt="2026-06-08T17:33:04.918" v="0"/>
+          <pc:sldLayoutMkLst>
+            <pc:docMk/>
+            <pc:sldMasterMk cId="3475336881" sldId="2147483688"/>
+            <pc:sldLayoutMk cId="2827021540" sldId="2147483693"/>
+          </pc:sldLayoutMkLst>
+        </pc:sldLayoutChg>
+      </pc:sldMasterChg>
+    </pc:docChg>
+  </pc:docChgLst>
   <pc:docChgLst>
     <pc:chgData name="Morgan, Robb" userId="6e49e175-ae62-4b25-a9b8-980198524bb0" providerId="ADAL" clId="{815032F7-E4C2-5F74-92C0-8B55A1DE40FC}"/>
     <pc:docChg chg="undo custSel delSld modSld">
@@ -381,52 +422,6 @@
       </pc:sldChg>
     </pc:docChg>
   </pc:docChgLst>
-  <pc:docChgLst>
-    <pc:chgData name="Hayes, Travis" userId="S::tahz@pge.com::4b9ddd45-6601-4923-a76c-85a08246e8f6" providerId="AD" clId="Web-{121215A5-E84B-6533-00E7-C3A7218C8746}"/>
-    <pc:docChg chg="addSld modSld">
-      <pc:chgData name="Hayes, Travis" userId="S::tahz@pge.com::4b9ddd45-6601-4923-a76c-85a08246e8f6" providerId="AD" clId="Web-{121215A5-E84B-6533-00E7-C3A7218C8746}" dt="2026-06-08T17:34:00.339" v="2"/>
-      <pc:docMkLst>
-        <pc:docMk/>
-      </pc:docMkLst>
-      <pc:sldChg chg="delSp add">
-        <pc:chgData name="Hayes, Travis" userId="S::tahz@pge.com::4b9ddd45-6601-4923-a76c-85a08246e8f6" providerId="AD" clId="Web-{121215A5-E84B-6533-00E7-C3A7218C8746}" dt="2026-06-08T17:33:12.261" v="1"/>
-        <pc:sldMkLst>
-          <pc:docMk/>
-          <pc:sldMk cId="2597882783" sldId="271"/>
-        </pc:sldMkLst>
-        <pc:spChg chg="del">
-          <ac:chgData name="Hayes, Travis" userId="S::tahz@pge.com::4b9ddd45-6601-4923-a76c-85a08246e8f6" providerId="AD" clId="Web-{121215A5-E84B-6533-00E7-C3A7218C8746}" dt="2026-06-08T17:33:12.261" v="1"/>
-          <ac:spMkLst>
-            <pc:docMk/>
-            <pc:sldMk cId="2597882783" sldId="271"/>
-            <ac:spMk id="6" creationId="{214C2BE7-D030-908A-FB14-B868990EDBB4}"/>
-          </ac:spMkLst>
-        </pc:spChg>
-      </pc:sldChg>
-      <pc:sldChg chg="add">
-        <pc:chgData name="Hayes, Travis" userId="S::tahz@pge.com::4b9ddd45-6601-4923-a76c-85a08246e8f6" providerId="AD" clId="Web-{121215A5-E84B-6533-00E7-C3A7218C8746}" dt="2026-06-08T17:34:00.339" v="2"/>
-        <pc:sldMkLst>
-          <pc:docMk/>
-          <pc:sldMk cId="349043267" sldId="272"/>
-        </pc:sldMkLst>
-      </pc:sldChg>
-      <pc:sldMasterChg chg="addSldLayout">
-        <pc:chgData name="Hayes, Travis" userId="S::tahz@pge.com::4b9ddd45-6601-4923-a76c-85a08246e8f6" providerId="AD" clId="Web-{121215A5-E84B-6533-00E7-C3A7218C8746}" dt="2026-06-08T17:33:04.918" v="0"/>
-        <pc:sldMasterMkLst>
-          <pc:docMk/>
-          <pc:sldMasterMk cId="3475336881" sldId="2147483688"/>
-        </pc:sldMasterMkLst>
-        <pc:sldLayoutChg chg="add">
-          <pc:chgData name="Hayes, Travis" userId="S::tahz@pge.com::4b9ddd45-6601-4923-a76c-85a08246e8f6" providerId="AD" clId="Web-{121215A5-E84B-6533-00E7-C3A7218C8746}" dt="2026-06-08T17:33:04.918" v="0"/>
-          <pc:sldLayoutMkLst>
-            <pc:docMk/>
-            <pc:sldMasterMk cId="3475336881" sldId="2147483688"/>
-            <pc:sldLayoutMk cId="2827021540" sldId="2147483693"/>
-          </pc:sldLayoutMkLst>
-        </pc:sldLayoutChg>
-      </pc:sldMasterChg>
-    </pc:docChg>
-  </pc:docChgLst>
 </pc:chgInfo>
 </file>
 
@@ -512,7 +507,7 @@
           <a:p>
             <a:fld id="{8C6E65AE-465E-7344-85CA-905F2682E015}" type="datetimeFigureOut">
               <a:rPr lang="en-US" smtClean="0"/>
-              <a:t>6/8/26</a:t>
+              <a:t>6/8/2026</a:t>
             </a:fld>
             <a:endParaRPr lang="en-US"/>
           </a:p>
@@ -2898,7 +2893,7 @@
           <a:p>
             <a:fld id="{FB33BCC6-0696-814A-9A6C-717F247124BB}" type="datetimeFigureOut">
               <a:rPr lang="en-US" smtClean="0"/>
-              <a:t>6/8/26</a:t>
+              <a:t>6/8/2026</a:t>
             </a:fld>
             <a:endParaRPr lang="en-US"/>
           </a:p>
@@ -3695,7 +3690,7 @@
           <a:p>
             <a:fld id="{FB33BCC6-0696-814A-9A6C-717F247124BB}" type="datetimeFigureOut">
               <a:rPr lang="en-US" smtClean="0"/>
-              <a:t>6/8/26</a:t>
+              <a:t>6/8/2026</a:t>
             </a:fld>
             <a:endParaRPr lang="en-US"/>
           </a:p>
@@ -4176,7 +4171,7 @@
           <a:lstStyle/>
           <a:p>
             <a:r>
-              <a:rPr lang="en-US" sz="2400" dirty="0"/>
+              <a:rPr lang="en-US" sz="2400"/>
               <a:t>Travis Hayes / Robb Morgan</a:t>
             </a:r>
           </a:p>
@@ -4209,7 +4204,7 @@
           <a:lstStyle/>
           <a:p>
             <a:r>
-              <a:rPr lang="en-US" dirty="0"/>
+              <a:rPr lang="en-US"/>
               <a:t>Senior Manager, IT Architecture / IT Solutions Engineer</a:t>
             </a:r>
           </a:p>
@@ -4300,41 +4295,41 @@
           <a:lstStyle/>
           <a:p>
             <a:r>
-              <a:rPr lang="en-US" dirty="0"/>
+              <a:rPr lang="en-US"/>
               <a:t>EPIC</a:t>
             </a:r>
           </a:p>
           <a:p>
             <a:r>
-              <a:rPr lang="en-US" sz="2400" b="1" dirty="0"/>
+              <a:rPr lang="en-US" sz="2400" b="1"/>
               <a:t>E</a:t>
             </a:r>
             <a:r>
-              <a:rPr lang="en-US" sz="2400" dirty="0"/>
+              <a:rPr lang="en-US" sz="2400"/>
               <a:t>nterprise </a:t>
             </a:r>
             <a:r>
-              <a:rPr lang="en-US" sz="2400" b="1" dirty="0"/>
+              <a:rPr lang="en-US" sz="2400" b="1"/>
               <a:t>P</a:t>
             </a:r>
             <a:r>
-              <a:rPr lang="en-US" sz="2400" dirty="0"/>
+              <a:rPr lang="en-US" sz="2400"/>
               <a:t>ipeline for </a:t>
             </a:r>
             <a:r>
-              <a:rPr lang="en-US" sz="2400" b="1" dirty="0"/>
+              <a:rPr lang="en-US" sz="2400" b="1"/>
               <a:t>I</a:t>
             </a:r>
             <a:r>
-              <a:rPr lang="en-US" sz="2400" dirty="0"/>
+              <a:rPr lang="en-US" sz="2400"/>
               <a:t>nfrastructure and </a:t>
             </a:r>
             <a:r>
-              <a:rPr lang="en-US" sz="2400" b="1" dirty="0"/>
+              <a:rPr lang="en-US" sz="2400" b="1"/>
               <a:t>C</a:t>
             </a:r>
             <a:r>
-              <a:rPr lang="en-US" sz="2400" dirty="0"/>
+              <a:rPr lang="en-US" sz="2400"/>
               <a:t>loud</a:t>
             </a:r>
           </a:p>
@@ -4787,7 +4782,7 @@
           <a:lstStyle/>
           <a:p>
             <a:r>
-              <a:rPr lang="en-US" sz="1400" b="1" dirty="0">
+              <a:rPr lang="en-US" sz="1400" b="1">
                 <a:solidFill>
                   <a:schemeClr val="bg1">
                     <a:lumMod val="50000"/>
@@ -4797,7 +4792,7 @@
               <a:t>Project Documentation:</a:t>
             </a:r>
             <a:r>
-              <a:rPr lang="en-US" sz="1400" dirty="0">
+              <a:rPr lang="en-US" sz="1400">
                 <a:solidFill>
                   <a:schemeClr val="bg1">
                     <a:lumMod val="50000"/>
@@ -4813,7 +4808,7 @@
               <a:buChar char="•"/>
             </a:pPr>
             <a:r>
-              <a:rPr lang="en-US" sz="1400" dirty="0">
+              <a:rPr lang="en-US" sz="1400">
                 <a:solidFill>
                   <a:schemeClr val="bg1">
                     <a:lumMod val="50000"/>
@@ -4823,7 +4818,7 @@
               <a:t>EPIC Repo: </a:t>
             </a:r>
             <a:r>
-              <a:rPr lang="en-US" sz="1400" dirty="0">
+              <a:rPr lang="en-US" sz="1400">
                 <a:solidFill>
                   <a:schemeClr val="bg1">
                     <a:lumMod val="50000"/>
@@ -4834,7 +4829,7 @@
               <a:t>https://github.com/pgetech/epic-pipeline</a:t>
             </a:r>
             <a:r>
-              <a:rPr lang="en-US" sz="1400" dirty="0">
+              <a:rPr lang="en-US" sz="1400">
                 <a:solidFill>
                   <a:schemeClr val="bg1">
                     <a:lumMod val="50000"/>
@@ -4845,7 +4840,7 @@
             </a:r>
           </a:p>
           <a:p>
-            <a:endParaRPr lang="en-US" sz="1400" b="1" dirty="0">
+            <a:endParaRPr lang="en-US" sz="1400" b="1">
               <a:solidFill>
                 <a:schemeClr val="bg1">
                   <a:lumMod val="50000"/>
@@ -4855,7 +4850,7 @@
           </a:p>
           <a:p>
             <a:r>
-              <a:rPr lang="en-US" sz="1400" b="1" dirty="0">
+              <a:rPr lang="en-US" sz="1400" b="1">
                 <a:solidFill>
                   <a:schemeClr val="bg1">
                     <a:lumMod val="50000"/>
@@ -4865,7 +4860,7 @@
               <a:t>Key Contacts:</a:t>
             </a:r>
             <a:r>
-              <a:rPr lang="en-US" sz="1400" dirty="0">
+              <a:rPr lang="en-US" sz="1400">
                 <a:solidFill>
                   <a:schemeClr val="bg1">
                     <a:lumMod val="50000"/>
@@ -4881,7 +4876,7 @@
               <a:buChar char="•"/>
             </a:pPr>
             <a:r>
-              <a:rPr lang="en-US" sz="1400" dirty="0">
+              <a:rPr lang="en-US" sz="1400">
                 <a:solidFill>
                   <a:schemeClr val="bg1">
                     <a:lumMod val="50000"/>
@@ -4891,7 +4886,7 @@
               <a:t>Travis Hayes: </a:t>
             </a:r>
             <a:r>
-              <a:rPr lang="en-US" sz="1400" dirty="0" err="1">
+              <a:rPr lang="en-US" sz="1400" err="1">
                 <a:solidFill>
                   <a:schemeClr val="bg1">
                     <a:lumMod val="50000"/>
@@ -4900,7 +4895,7 @@
               </a:rPr>
               <a:t>TAHZ@pge.com</a:t>
             </a:r>
-            <a:endParaRPr lang="en-US" sz="1400" dirty="0">
+            <a:endParaRPr lang="en-US" sz="1400">
               <a:solidFill>
                 <a:schemeClr val="bg1">
                   <a:lumMod val="50000"/>
@@ -4914,7 +4909,7 @@
               <a:buChar char="•"/>
             </a:pPr>
             <a:r>
-              <a:rPr lang="en-US" sz="1400" dirty="0">
+              <a:rPr lang="en-US" sz="1400">
                 <a:solidFill>
                   <a:schemeClr val="bg1">
                     <a:lumMod val="50000"/>
@@ -4924,7 +4919,7 @@
               <a:t>Robb Morgan: </a:t>
             </a:r>
             <a:r>
-              <a:rPr lang="en-US" sz="1400" dirty="0" err="1">
+              <a:rPr lang="en-US" sz="1400" err="1">
                 <a:solidFill>
                   <a:schemeClr val="bg1">
                     <a:lumMod val="50000"/>
@@ -4934,9 +4929,9 @@
               <a:t>RHMG@pge.com</a:t>
             </a:r>
             <a:br>
-              <a:rPr lang="en-US" dirty="0"/>
+              <a:rPr lang="en-US"/>
             </a:br>
-            <a:endParaRPr kumimoji="0" lang="en-US" sz="1100" b="0" i="1" u="none" strike="noStrike" kern="1200" cap="none" spc="0" normalizeH="0" baseline="0" noProof="0" dirty="0">
+            <a:endParaRPr kumimoji="0" lang="en-US" sz="1100" b="0" i="1" u="none" strike="noStrike" kern="1200" cap="none" spc="0" normalizeH="0" baseline="0" noProof="0">
               <a:ln>
                 <a:noFill/>
               </a:ln>
@@ -17457,7 +17452,7 @@
           <a:lstStyle/>
           <a:p>
             <a:r>
-              <a:rPr lang="en-US" sz="1800" b="1" dirty="0">
+              <a:rPr lang="en-US" sz="1800" b="1">
                 <a:solidFill>
                   <a:schemeClr val="tx2"/>
                 </a:solidFill>
@@ -17466,7 +17461,7 @@
             </a:r>
           </a:p>
           <a:p>
-            <a:endParaRPr lang="en-US" dirty="0"/>
+            <a:endParaRPr lang="en-US"/>
           </a:p>
           <a:p>
             <a:pPr marL="342900" indent="-342900">
@@ -17477,7 +17472,7 @@
               <a:buAutoNum type="arabicPeriod"/>
             </a:pPr>
             <a:r>
-              <a:rPr lang="en-US" sz="1200" dirty="0"/>
+              <a:rPr lang="en-US" sz="1200"/>
               <a:t>Universal Pipeline — one ADO framework adopted by every PG&amp;E app team. As a regulated utility, consistent security, audit, and governance controls are mandatory across every workload — not optional per-team choices.</a:t>
             </a:r>
           </a:p>
@@ -17490,15 +17485,15 @@
               <a:buAutoNum type="arabicPeriod"/>
             </a:pPr>
             <a:r>
-              <a:rPr lang="en-US" sz="1200" dirty="0"/>
+              <a:rPr lang="en-US" sz="1200"/>
               <a:t>Single contract per app — every team onboards via .pipeline/</a:t>
             </a:r>
             <a:r>
-              <a:rPr lang="en-US" sz="1200" dirty="0" err="1"/>
+              <a:rPr lang="en-US" sz="1200" err="1"/>
               <a:t>epic.json</a:t>
             </a:r>
             <a:r>
-              <a:rPr lang="en-US" sz="1200" dirty="0"/>
+              <a:rPr lang="en-US" sz="1200"/>
               <a:t>; the contract drives stage selection (Build · Test · Scan · Infra · Deploy · Integration) and infrastructure provisioning.</a:t>
             </a:r>
           </a:p>
@@ -17511,7 +17506,7 @@
               <a:buAutoNum type="arabicPeriod"/>
             </a:pPr>
             <a:r>
-              <a:rPr lang="en-US" sz="1200" dirty="0"/>
+              <a:rPr lang="en-US" sz="1200"/>
               <a:t>Multi-cloud deployment — one pipeline targets AWS, Azure, Azure Local, and SAP BTP based on cloud.* in the contract.</a:t>
             </a:r>
           </a:p>
@@ -17524,7 +17519,7 @@
               <a:buAutoNum type="arabicPeriod"/>
             </a:pPr>
             <a:r>
-              <a:rPr lang="en-US" sz="1200" dirty="0"/>
+              <a:rPr lang="en-US" sz="1200"/>
               <a:t>Self-service runs + automated CI — users trigger builds from the EPIC dashboard, and PR merges to tracked branches kick off CI automatically.</a:t>
             </a:r>
           </a:p>
@@ -17537,15 +17532,15 @@
               <a:buAutoNum type="arabicPeriod"/>
             </a:pPr>
             <a:r>
-              <a:rPr lang="en-US" sz="1200" dirty="0"/>
+              <a:rPr lang="en-US" sz="1200"/>
               <a:t>Per-app, per-environment infrastructure — Terraform .infra/ provisioned through reusable </a:t>
             </a:r>
             <a:r>
-              <a:rPr lang="en-US" sz="1200" dirty="0" err="1"/>
+              <a:rPr lang="en-US" sz="1200" err="1"/>
               <a:t>pgetech</a:t>
             </a:r>
             <a:r>
-              <a:rPr lang="en-US" sz="1200" dirty="0"/>
+              <a:rPr lang="en-US" sz="1200"/>
               <a:t>/epic-pipeline-modules.</a:t>
             </a:r>
           </a:p>
